--- a/dist/초2/기술·가정/재료와제작/초2_기술·가정_재료와제작_01_재료비교와도구안전.pptx
+++ b/dist/초2/기술·가정/재료와제작/초2_기술·가정_재료와제작_01_재료비교와도구안전.pptx
@@ -115,41 +115,41 @@
   <p:extLst>
     <p:ext uri="{521415D9-36F7-43E2-AB2F-B90AF26B5E84}">
       <p14:sectionLst xmlns:p14="http://schemas.microsoft.com/office/powerpoint/2010/main">
-        <p14:section name="도입" id="{633276bb-337a-1c7e-2938-d9ebf98c5846}">
+        <p14:section name="도입" id="{4b8e335c-d050-14e5-ade0-c76d35fdf83d}">
           <p14:sldIdLst>
             <p14:sldId id="256"/>
             <p14:sldId id="257"/>
           </p14:sldIdLst>
         </p14:section>
-        <p14:section name="개념" id="{a69cf80a-a1de-2d0b-c61a-46acdba9adc7}">
+        <p14:section name="개념" id="{7eab0a5b-031b-a6d2-8db9-1c4824635b8b}">
           <p14:sldIdLst>
             <p14:sldId id="258"/>
             <p14:sldId id="260"/>
           </p14:sldIdLst>
         </p14:section>
-        <p14:section name="연습" id="{4f3cd11f-7ff9-ca69-2263-117c95ba6570}">
+        <p14:section name="연습" id="{fc3caddf-a9f4-d7e3-83f1-f22e6fb9a4e7}">
           <p14:sldIdLst>
             <p14:sldId id="259"/>
             <p14:sldId id="261"/>
           </p14:sldIdLst>
         </p14:section>
-        <p14:section name="개념" id="{bc19ce39-dcc0-e66b-3c75-81d0a7bd1333}">
+        <p14:section name="개념" id="{42d72028-1c89-de99-e25b-8a5499b155d7}">
           <p14:sldIdLst/>
         </p14:section>
-        <p14:section name="연습" id="{426f9e21-7fdd-643e-9447-007675114a95}">
+        <p14:section name="연습" id="{14f12857-836c-b1b8-298b-8f30637e9608}">
           <p14:sldIdLst/>
         </p14:section>
-        <p14:section name="확인" id="{5dc05c4d-f63a-428e-2793-513bd2e16e1b}">
+        <p14:section name="확인" id="{107bbd2a-d0be-4e04-50fc-dd92cecfd8c8}">
           <p14:sldIdLst>
             <p14:sldId id="262"/>
           </p14:sldIdLst>
         </p14:section>
-        <p14:section name="정리" id="{058c6279-fe0a-7bde-bf05-7abbe18269ef}">
+        <p14:section name="정리" id="{efcce5be-fdb7-9256-3ed5-09cb95f560d4}">
           <p14:sldIdLst>
             <p14:sldId id="263"/>
           </p14:sldIdLst>
         </p14:section>
-        <p14:section name="보충" id="{58f9df51-1842-aec9-4b8b-e4997b3486b7}">
+        <p14:section name="보충" id="{4cbf1583-6d9f-69b6-0dcd-a3b10034ad98}">
           <p14:sldIdLst>
             <p14:sldId id="264"/>
           </p14:sldIdLst>

--- a/dist/초2/기술·가정/재료와제작/초2_기술·가정_재료와제작_01_재료비교와도구안전.pptx
+++ b/dist/초2/기술·가정/재료와제작/초2_기술·가정_재료와제작_01_재료비교와도구안전.pptx
@@ -115,41 +115,41 @@
   <p:extLst>
     <p:ext uri="{521415D9-36F7-43E2-AB2F-B90AF26B5E84}">
       <p14:sectionLst xmlns:p14="http://schemas.microsoft.com/office/powerpoint/2010/main">
-        <p14:section name="도입" id="{4b8e335c-d050-14e5-ade0-c76d35fdf83d}">
+        <p14:section name="도입" id="{6d8e780b-b254-5280-b1ae-c696afcdfb05}">
           <p14:sldIdLst>
             <p14:sldId id="256"/>
             <p14:sldId id="257"/>
           </p14:sldIdLst>
         </p14:section>
-        <p14:section name="개념" id="{7eab0a5b-031b-a6d2-8db9-1c4824635b8b}">
+        <p14:section name="개념" id="{13f590fa-f697-5536-b4ad-7add4823ddb8}">
           <p14:sldIdLst>
             <p14:sldId id="258"/>
             <p14:sldId id="260"/>
           </p14:sldIdLst>
         </p14:section>
-        <p14:section name="연습" id="{fc3caddf-a9f4-d7e3-83f1-f22e6fb9a4e7}">
+        <p14:section name="연습" id="{d64e2198-c2e0-342f-642d-70075bd412d9}">
           <p14:sldIdLst>
             <p14:sldId id="259"/>
             <p14:sldId id="261"/>
           </p14:sldIdLst>
         </p14:section>
-        <p14:section name="개념" id="{42d72028-1c89-de99-e25b-8a5499b155d7}">
+        <p14:section name="개념" id="{9d4f1475-1364-290d-f38b-3944424b58e3}">
           <p14:sldIdLst/>
         </p14:section>
-        <p14:section name="연습" id="{14f12857-836c-b1b8-298b-8f30637e9608}">
+        <p14:section name="연습" id="{fbc97135-9cb7-3d7c-2843-8ce677bf2d18}">
           <p14:sldIdLst/>
         </p14:section>
-        <p14:section name="확인" id="{107bbd2a-d0be-4e04-50fc-dd92cecfd8c8}">
+        <p14:section name="확인" id="{0bfd81e9-7503-fe04-176c-958f9d3fed38}">
           <p14:sldIdLst>
             <p14:sldId id="262"/>
           </p14:sldIdLst>
         </p14:section>
-        <p14:section name="정리" id="{efcce5be-fdb7-9256-3ed5-09cb95f560d4}">
+        <p14:section name="정리" id="{aef1193a-d226-3fb0-8a6b-e050af1359f5}">
           <p14:sldIdLst>
             <p14:sldId id="263"/>
           </p14:sldIdLst>
         </p14:section>
-        <p14:section name="보충" id="{4cbf1583-6d9f-69b6-0dcd-a3b10034ad98}">
+        <p14:section name="보충" id="{10adc606-36b8-a5c2-b201-abc093f6cc2c}">
           <p14:sldIdLst>
             <p14:sldId id="264"/>
           </p14:sldIdLst>
@@ -666,7 +666,7 @@
 - ③ “손가락을 조심해요.” “가위를 들고 뛰지 않아요.” “사람에게 가위를 향하지 않아요.”
 막히면
 - 느낌 낱말이 나오지 않거나 가위를 어떻게 잡는지 모르면 S09(보충)를 먼저 합니다.
-- 이 차시는 계획상 앞 차시가 없습니다. 초1 ‘안전한 재료로 만들기’와 이어지는 내용입니다.
+- 초1 ‘안전한 재료로 만들기’와 이어지는 내용입니다.
 주의
 - ③에서 아이가 말한 것은 S05에서 다시 확인하니 정리만 해 둡니다.</a:t>
             </a:r>
@@ -1381,7 +1381,7 @@
 막히면
 - 가위를 쥐기 어려우면 종이 없이 벌렸다 닫았다만 열 번 연습합니다.
 주의
-- 이 차시는 계획상 앞 차시가 없습니다. 보충으로도 어렵다면 초1 ‘안전한 재료로 만들기’처럼 종이를 손으로 찢고 접어 만드는 활동을 먼저 합니다.</a:t>
+- 보충으로도 어렵다면 초1 ‘안전한 재료로 만들기’처럼 종이를 손으로 찢고 접어 만드는 활동을 먼저 합니다.</a:t>
             </a:r>
             <a:endParaRPr lang="en-US" dirty="0"/>
           </a:p>
